--- a/wada-tue-scoping-review/manuscripts/SCJ_Figures_Japanese.pptx
+++ b/wada-tue-scoping-review/manuscripts/SCJ_Figures_Japanese.pptx
@@ -3226,6 +3226,108 @@
       </p:sp>
       <p:pic>
         <p:nvPicPr>
+          <p:cNvPr id="3" name="Picture 2" descr="fig4_conceptual_framework.png"/>
+          <p:cNvPicPr>
+            <a:picLocks noChangeAspect="1"/>
+          </p:cNvPicPr>
+          <p:nvPr/>
+        </p:nvPicPr>
+        <p:blipFill>
+          <a:blip r:embed="rId2"/>
+          <a:stretch>
+            <a:fillRect/>
+          </a:stretch>
+        </p:blipFill>
+        <p:spPr>
+          <a:xfrm>
+            <a:off x="3227482" y="914400"/>
+            <a:ext cx="5736730" cy="4572000"/>
+          </a:xfrm>
+          <a:prstGeom prst="rect">
+            <a:avLst/>
+          </a:prstGeom>
+        </p:spPr>
+      </p:pic>
+      <p:sp>
+        <p:nvSpPr>
+          <p:cNvPr id="4" name="TextBox 3"/>
+          <p:cNvSpPr txBox="1"/>
+          <p:nvPr/>
+        </p:nvSpPr>
+        <p:spPr>
+          <a:xfrm>
+            <a:off x="457200" y="5943600"/>
+            <a:ext cx="11247120" cy="731520"/>
+          </a:xfrm>
+          <a:prstGeom prst="rect">
+            <a:avLst/>
+          </a:prstGeom>
+          <a:noFill/>
+        </p:spPr>
+        <p:txBody>
+          <a:bodyPr wrap="square">
+            <a:spAutoFit/>
+          </a:bodyPr>
+          <a:lstStyle/>
+          <a:p>
+            <a:pPr algn="ctr"/>
+            <a:r>
+              <a:rPr sz="1400" i="1"/>
+              <a:t>図 2. 概念的フレームワーク：臨床─競技乖離の構造的駆動要因。</a:t>
+            </a:r>
+          </a:p>
+        </p:txBody>
+      </p:sp>
+    </p:spTree>
+  </p:cSld>
+  <p:clrMapOvr>
+    <a:masterClrMapping/>
+  </p:clrMapOvr>
+</p:sld>
+</file>
+
+<file path=ppt/slides/slide3.xml><?xml version="1.0" encoding="utf-8"?>
+<p:sld xmlns:a="http://schemas.openxmlformats.org/drawingml/2006/main" xmlns:p="http://schemas.openxmlformats.org/presentationml/2006/main" xmlns:r="http://schemas.openxmlformats.org/officeDocument/2006/relationships">
+  <p:cSld>
+    <p:spTree>
+      <p:nvGrpSpPr>
+        <p:cNvPr id="1" name=""/>
+        <p:cNvGrpSpPr/>
+        <p:nvPr/>
+      </p:nvGrpSpPr>
+      <p:grpSpPr/>
+      <p:sp>
+        <p:nvSpPr>
+          <p:cNvPr id="2" name="TextBox 1"/>
+          <p:cNvSpPr txBox="1"/>
+          <p:nvPr/>
+        </p:nvSpPr>
+        <p:spPr>
+          <a:xfrm>
+            <a:off x="457200" y="182880"/>
+            <a:ext cx="11247120" cy="548640"/>
+          </a:xfrm>
+          <a:prstGeom prst="rect">
+            <a:avLst/>
+          </a:prstGeom>
+          <a:noFill/>
+        </p:spPr>
+        <p:txBody>
+          <a:bodyPr wrap="square">
+            <a:spAutoFit/>
+          </a:bodyPr>
+          <a:lstStyle/>
+          <a:p>
+            <a:pPr algn="ctr"/>
+            <a:r>
+              <a:rPr b="1" sz="2400"/>
+              <a:t>図 3</a:t>
+            </a:r>
+          </a:p>
+        </p:txBody>
+      </p:sp>
+      <p:pic>
+        <p:nvPicPr>
           <p:cNvPr id="3" name="Picture 2" descr="fig2_gap_heatmap.png"/>
           <p:cNvPicPr>
             <a:picLocks noChangeAspect="1"/>
@@ -3273,7 +3375,7 @@
             <a:pPr algn="ctr"/>
             <a:r>
               <a:rPr sz="1400" i="1"/>
-              <a:t>図 2. 臨床─競技ギャップリスクマトリックス：疾患領域×評価次元。</a:t>
+              <a:t>図 3. 臨床─競技ギャップリスクマトリックス：疾患領域×評価次元。</a:t>
             </a:r>
           </a:p>
         </p:txBody>
@@ -3286,7 +3388,7 @@
 </p:sld>
 </file>
 
-<file path=ppt/slides/slide3.xml><?xml version="1.0" encoding="utf-8"?>
+<file path=ppt/slides/slide4.xml><?xml version="1.0" encoding="utf-8"?>
 <p:sld xmlns:a="http://schemas.openxmlformats.org/drawingml/2006/main" xmlns:p="http://schemas.openxmlformats.org/presentationml/2006/main" xmlns:r="http://schemas.openxmlformats.org/officeDocument/2006/relationships">
   <p:cSld>
     <p:spTree>
@@ -3321,7 +3423,7 @@
             <a:pPr algn="ctr"/>
             <a:r>
               <a:rPr b="1" sz="2400"/>
-              <a:t>図 3</a:t>
+              <a:t>図 4</a:t>
             </a:r>
           </a:p>
         </p:txBody>
@@ -3375,109 +3477,7 @@
             <a:pPr algn="ctr"/>
             <a:r>
               <a:rPr sz="1400" i="1"/>
-              <a:t>図 3. 臨床ガイドライン更新とWADA TUE規制変更のタイムライン（2018–2026）。</a:t>
-            </a:r>
-          </a:p>
-        </p:txBody>
-      </p:sp>
-    </p:spTree>
-  </p:cSld>
-  <p:clrMapOvr>
-    <a:masterClrMapping/>
-  </p:clrMapOvr>
-</p:sld>
-</file>
-
-<file path=ppt/slides/slide4.xml><?xml version="1.0" encoding="utf-8"?>
-<p:sld xmlns:a="http://schemas.openxmlformats.org/drawingml/2006/main" xmlns:p="http://schemas.openxmlformats.org/presentationml/2006/main" xmlns:r="http://schemas.openxmlformats.org/officeDocument/2006/relationships">
-  <p:cSld>
-    <p:spTree>
-      <p:nvGrpSpPr>
-        <p:cNvPr id="1" name=""/>
-        <p:cNvGrpSpPr/>
-        <p:nvPr/>
-      </p:nvGrpSpPr>
-      <p:grpSpPr/>
-      <p:sp>
-        <p:nvSpPr>
-          <p:cNvPr id="2" name="TextBox 1"/>
-          <p:cNvSpPr txBox="1"/>
-          <p:nvPr/>
-        </p:nvSpPr>
-        <p:spPr>
-          <a:xfrm>
-            <a:off x="457200" y="182880"/>
-            <a:ext cx="11247120" cy="548640"/>
-          </a:xfrm>
-          <a:prstGeom prst="rect">
-            <a:avLst/>
-          </a:prstGeom>
-          <a:noFill/>
-        </p:spPr>
-        <p:txBody>
-          <a:bodyPr wrap="square">
-            <a:spAutoFit/>
-          </a:bodyPr>
-          <a:lstStyle/>
-          <a:p>
-            <a:pPr algn="ctr"/>
-            <a:r>
-              <a:rPr b="1" sz="2400"/>
-              <a:t>図 4</a:t>
-            </a:r>
-          </a:p>
-        </p:txBody>
-      </p:sp>
-      <p:pic>
-        <p:nvPicPr>
-          <p:cNvPr id="3" name="Picture 2" descr="fig4_conceptual_framework.png"/>
-          <p:cNvPicPr>
-            <a:picLocks noChangeAspect="1"/>
-          </p:cNvPicPr>
-          <p:nvPr/>
-        </p:nvPicPr>
-        <p:blipFill>
-          <a:blip r:embed="rId2"/>
-          <a:stretch>
-            <a:fillRect/>
-          </a:stretch>
-        </p:blipFill>
-        <p:spPr>
-          <a:xfrm>
-            <a:off x="3227482" y="914400"/>
-            <a:ext cx="5736730" cy="4572000"/>
-          </a:xfrm>
-          <a:prstGeom prst="rect">
-            <a:avLst/>
-          </a:prstGeom>
-        </p:spPr>
-      </p:pic>
-      <p:sp>
-        <p:nvSpPr>
-          <p:cNvPr id="4" name="TextBox 3"/>
-          <p:cNvSpPr txBox="1"/>
-          <p:nvPr/>
-        </p:nvSpPr>
-        <p:spPr>
-          <a:xfrm>
-            <a:off x="457200" y="5943600"/>
-            <a:ext cx="11247120" cy="731520"/>
-          </a:xfrm>
-          <a:prstGeom prst="rect">
-            <a:avLst/>
-          </a:prstGeom>
-          <a:noFill/>
-        </p:spPr>
-        <p:txBody>
-          <a:bodyPr wrap="square">
-            <a:spAutoFit/>
-          </a:bodyPr>
-          <a:lstStyle/>
-          <a:p>
-            <a:pPr algn="ctr"/>
-            <a:r>
-              <a:rPr sz="1400" i="1"/>
-              <a:t>図 4. 概念的フレームワーク：臨床─競技乖離の構造的駆動要因。</a:t>
+              <a:t>図 4. 臨床ガイドライン更新とWADA TUE規制変更のタイムライン（2018–2026）。</a:t>
             </a:r>
           </a:p>
         </p:txBody>

--- a/wada-tue-scoping-review/manuscripts/SCJ_Figures_Japanese.pptx
+++ b/wada-tue-scoping-review/manuscripts/SCJ_Figures_Japanese.pptx
@@ -3546,8 +3546,8 @@
         </p:blipFill>
         <p:spPr>
           <a:xfrm>
-            <a:off x="1848563" y="914400"/>
-            <a:ext cx="8494568" cy="4572000"/>
+            <a:off x="1855791" y="914400"/>
+            <a:ext cx="8480113" cy="4572000"/>
           </a:xfrm>
           <a:prstGeom prst="rect">
             <a:avLst/>
